--- a/Day2_Runtime_Performance_Deployment_JAX_MatMul.pptx
+++ b/Day2_Runtime_Performance_Deployment_JAX_MatMul.pptx
@@ -7403,7 +7403,7 @@
 </file>
 
 <file path=ppt/slides/slide2.xml><?xml version="1.0" encoding="utf-8"?>
-<p:sld xmlns:a="http://schemas.openxmlformats.org/drawingml/2006/main" xmlns:p="http://schemas.openxmlformats.org/presentationml/2006/main" xmlns:r="http://schemas.openxmlformats.org/officeDocument/2006/relationships">
+<p:sld xmlns:a="http://schemas.openxmlformats.org/drawingml/2006/main" xmlns:p="http://schemas.openxmlformats.org/presentationml/2006/main">
   <p:cSld>
     <p:bg>
       <p:bgPr>
@@ -7615,30 +7615,344 @@
           </a:p>
         </p:txBody>
       </p:sp>
-      <p:pic>
-        <p:nvPicPr>
-          <p:cNvPr id="7" name="Picture 6" descr="target_graph.png"/>
-          <p:cNvPicPr>
-            <a:picLocks noChangeAspect="1"/>
-          </p:cNvPicPr>
-          <p:nvPr/>
-        </p:nvPicPr>
-        <p:blipFill>
-          <a:blip r:embed="rId2"/>
-          <a:stretch>
-            <a:fillRect/>
-          </a:stretch>
-        </p:blipFill>
-        <p:spPr>
-          <a:xfrm>
-            <a:off x="594360" y="2101595"/>
-            <a:ext cx="6766560" cy="3157728"/>
-          </a:xfrm>
-          <a:prstGeom prst="rect">
-            <a:avLst/>
-          </a:prstGeom>
-        </p:spPr>
-      </p:pic>
+      <p:sp>
+        <p:nvSpPr>
+          <p:cNvPr id="10" name="Target Graph Diagram Title"/>
+          <p:cNvSpPr txBox="1"/>
+          <p:nvPr/>
+        </p:nvSpPr>
+        <p:spPr>
+          <a:xfrm>
+            <a:off x="786384" y="2240280"/>
+            <a:ext cx="6309360" cy="320040"/>
+          </a:xfrm>
+          <a:prstGeom prst="rect">
+            <a:avLst/>
+          </a:prstGeom>
+          <a:noFill/>
+          <a:ln/>
+        </p:spPr>
+        <p:txBody>
+          <a:bodyPr wrap="square" anchor="t" lIns="0" tIns="0" rIns="0" bIns="0">
+            <a:normAutofit/>
+          </a:bodyPr>
+          <a:lstStyle/>
+          <a:p>
+            <a:pPr algn="l"/>
+            <a:r>
+              <a:rPr sz="1200" b="1">
+                <a:solidFill>
+                  <a:srgbClr val="121B2A"/>
+                </a:solidFill>
+                <a:latin typeface="Aptos"/>
+              </a:rPr>
+              <a:t>Bazel target graph mirrors project architecture</a:t>
+            </a:r>
+          </a:p>
+        </p:txBody>
+      </p:sp>
+      <p:sp>
+        <p:nvSpPr>
+          <p:cNvPr id="11" name="Benchmark Target Node"/>
+          <p:cNvSpPr/>
+          <p:nvPr/>
+        </p:nvSpPr>
+        <p:spPr>
+          <a:xfrm>
+            <a:off x="960120" y="3200400"/>
+            <a:ext cx="1325880" cy="512064"/>
+          </a:xfrm>
+          <a:prstGeom prst="roundRect">
+            <a:avLst/>
+          </a:prstGeom>
+          <a:solidFill>
+            <a:srgbClr val="E6F6F8"/>
+          </a:solidFill>
+          <a:ln w="10160">
+            <a:solidFill>
+              <a:srgbClr val="9BA9B8"/>
+            </a:solidFill>
+          </a:ln>
+        </p:spPr>
+        <p:txBody>
+          <a:bodyPr wrap="square" anchor="ctr" lIns="73152" tIns="27432" rIns="73152" bIns="27432">
+            <a:normAutofit/>
+          </a:bodyPr>
+          <a:lstStyle/>
+          <a:p>
+            <a:pPr algn="ctr"/>
+            <a:r>
+              <a:rPr sz="950">
+                <a:solidFill>
+                  <a:srgbClr val="1C2430"/>
+                </a:solidFill>
+                <a:latin typeface="Aptos"/>
+              </a:rPr>
+              <a:t>benchmark</a:t>
+            </a:r>
+          </a:p>
+        </p:txBody>
+      </p:sp>
+      <p:sp>
+        <p:nvSpPr>
+          <p:cNvPr id="12" name="Vector CPU Target Node"/>
+          <p:cNvSpPr/>
+          <p:nvPr/>
+        </p:nvSpPr>
+        <p:spPr>
+          <a:xfrm>
+            <a:off x="2606040" y="2816352"/>
+            <a:ext cx="1417320" cy="512064"/>
+          </a:xfrm>
+          <a:prstGeom prst="roundRect">
+            <a:avLst/>
+          </a:prstGeom>
+          <a:solidFill>
+            <a:srgbClr val="E4EFFC"/>
+          </a:solidFill>
+          <a:ln w="10160">
+            <a:solidFill>
+              <a:srgbClr val="9BA9B8"/>
+            </a:solidFill>
+          </a:ln>
+        </p:spPr>
+        <p:txBody>
+          <a:bodyPr wrap="square" anchor="ctr" lIns="73152" tIns="27432" rIns="73152" bIns="27432">
+            <a:normAutofit/>
+          </a:bodyPr>
+          <a:lstStyle/>
+          <a:p>
+            <a:pPr algn="ctr"/>
+            <a:r>
+              <a:rPr sz="950">
+                <a:solidFill>
+                  <a:srgbClr val="1C2430"/>
+                </a:solidFill>
+                <a:latin typeface="Aptos"/>
+              </a:rPr>
+              <a:t>vector_cpu</a:t>
+            </a:r>
+          </a:p>
+        </p:txBody>
+      </p:sp>
+      <p:sp>
+        <p:nvSpPr>
+          <p:cNvPr id="13" name="Vector Add Target Node"/>
+          <p:cNvSpPr/>
+          <p:nvPr/>
+        </p:nvSpPr>
+        <p:spPr>
+          <a:xfrm>
+            <a:off x="2606040" y="3730752"/>
+            <a:ext cx="1417320" cy="512064"/>
+          </a:xfrm>
+          <a:prstGeom prst="roundRect">
+            <a:avLst/>
+          </a:prstGeom>
+          <a:solidFill>
+            <a:srgbClr val="EAF8E7"/>
+          </a:solidFill>
+          <a:ln w="10160">
+            <a:solidFill>
+              <a:srgbClr val="9BA9B8"/>
+            </a:solidFill>
+          </a:ln>
+        </p:spPr>
+        <p:txBody>
+          <a:bodyPr wrap="square" anchor="ctr" lIns="73152" tIns="27432" rIns="73152" bIns="27432">
+            <a:normAutofit/>
+          </a:bodyPr>
+          <a:lstStyle/>
+          <a:p>
+            <a:pPr algn="ctr"/>
+            <a:r>
+              <a:rPr sz="950">
+                <a:solidFill>
+                  <a:srgbClr val="1C2430"/>
+                </a:solidFill>
+                <a:latin typeface="Aptos"/>
+              </a:rPr>
+              <a:t>vector_add</a:t>
+            </a:r>
+          </a:p>
+        </p:txBody>
+      </p:sp>
+      <p:sp>
+        <p:nvSpPr>
+          <p:cNvPr id="14" name="Device Lib Target Node"/>
+          <p:cNvSpPr/>
+          <p:nvPr/>
+        </p:nvSpPr>
+        <p:spPr>
+          <a:xfrm>
+            <a:off x="4343400" y="3730752"/>
+            <a:ext cx="1325880" cy="512064"/>
+          </a:xfrm>
+          <a:prstGeom prst="roundRect">
+            <a:avLst/>
+          </a:prstGeom>
+          <a:solidFill>
+            <a:srgbClr val="FFF4DE"/>
+          </a:solidFill>
+          <a:ln w="10160">
+            <a:solidFill>
+              <a:srgbClr val="9BA9B8"/>
+            </a:solidFill>
+          </a:ln>
+        </p:spPr>
+        <p:txBody>
+          <a:bodyPr wrap="square" anchor="ctr" lIns="73152" tIns="27432" rIns="73152" bIns="27432">
+            <a:normAutofit/>
+          </a:bodyPr>
+          <a:lstStyle/>
+          <a:p>
+            <a:pPr algn="ctr"/>
+            <a:r>
+              <a:rPr sz="950">
+                <a:solidFill>
+                  <a:srgbClr val="1C2430"/>
+                </a:solidFill>
+                <a:latin typeface="Aptos"/>
+              </a:rPr>
+              <a:t>device_lib</a:t>
+            </a:r>
+          </a:p>
+        </p:txBody>
+      </p:sp>
+      <p:sp>
+        <p:nvSpPr>
+          <p:cNvPr id="15" name="Runtime Target Node"/>
+          <p:cNvSpPr/>
+          <p:nvPr/>
+        </p:nvSpPr>
+        <p:spPr>
+          <a:xfrm>
+            <a:off x="5943600" y="3730752"/>
+            <a:ext cx="1234440" cy="512064"/>
+          </a:xfrm>
+          <a:prstGeom prst="roundRect">
+            <a:avLst/>
+          </a:prstGeom>
+          <a:solidFill>
+            <a:srgbClr val="EAE5FF"/>
+          </a:solidFill>
+          <a:ln w="10160">
+            <a:solidFill>
+              <a:srgbClr val="9BA9B8"/>
+            </a:solidFill>
+          </a:ln>
+        </p:spPr>
+        <p:txBody>
+          <a:bodyPr wrap="square" anchor="ctr" lIns="73152" tIns="27432" rIns="73152" bIns="27432">
+            <a:normAutofit/>
+          </a:bodyPr>
+          <a:lstStyle/>
+          <a:p>
+            <a:pPr algn="ctr"/>
+            <a:r>
+              <a:rPr sz="950">
+                <a:solidFill>
+                  <a:srgbClr val="1C2430"/>
+                </a:solidFill>
+                <a:latin typeface="Aptos"/>
+              </a:rPr>
+              <a:t>runtime</a:t>
+            </a:r>
+          </a:p>
+        </p:txBody>
+      </p:sp>
+      <p:sp>
+        <p:nvSpPr>
+          <p:cNvPr id="16" name="Benchmark To Vector CPU Connector"/>
+          <p:cNvSpPr/>
+          <p:nvPr/>
+        </p:nvSpPr>
+        <p:spPr>
+          <a:xfrm flipV="1">
+            <a:off x="2286000" y="3072384"/>
+            <a:ext cx="320040" cy="384048"/>
+          </a:xfrm>
+          <a:prstGeom prst="line">
+            <a:avLst/>
+          </a:prstGeom>
+          <a:noFill/>
+          <a:ln w="22860" cap="round">
+            <a:solidFill>
+              <a:srgbClr val="65B000"/>
+            </a:solidFill>
+            <a:tailEnd type="triangle" w="med" len="med"/>
+          </a:ln>
+        </p:spPr>
+      </p:sp>
+      <p:sp>
+        <p:nvSpPr>
+          <p:cNvPr id="17" name="Benchmark To Vector Add Connector"/>
+          <p:cNvSpPr/>
+          <p:nvPr/>
+        </p:nvSpPr>
+        <p:spPr>
+          <a:xfrm>
+            <a:off x="2286000" y="3456432"/>
+            <a:ext cx="320040" cy="530352"/>
+          </a:xfrm>
+          <a:prstGeom prst="line">
+            <a:avLst/>
+          </a:prstGeom>
+          <a:noFill/>
+          <a:ln w="22860" cap="round">
+            <a:solidFill>
+              <a:srgbClr val="65B000"/>
+            </a:solidFill>
+            <a:tailEnd type="triangle" w="med" len="med"/>
+          </a:ln>
+        </p:spPr>
+      </p:sp>
+      <p:sp>
+        <p:nvSpPr>
+          <p:cNvPr id="18" name="Vector Add To Device Lib Connector"/>
+          <p:cNvSpPr/>
+          <p:nvPr/>
+        </p:nvSpPr>
+        <p:spPr>
+          <a:xfrm>
+            <a:off x="4023360" y="3986784"/>
+            <a:ext cx="320040" cy="0"/>
+          </a:xfrm>
+          <a:prstGeom prst="line">
+            <a:avLst/>
+          </a:prstGeom>
+          <a:noFill/>
+          <a:ln w="22860" cap="round">
+            <a:solidFill>
+              <a:srgbClr val="65B000"/>
+            </a:solidFill>
+            <a:tailEnd type="triangle" w="med" len="med"/>
+          </a:ln>
+        </p:spPr>
+      </p:sp>
+      <p:sp>
+        <p:nvSpPr>
+          <p:cNvPr id="19" name="Device Lib To Runtime Connector"/>
+          <p:cNvSpPr/>
+          <p:nvPr/>
+        </p:nvSpPr>
+        <p:spPr>
+          <a:xfrm>
+            <a:off x="5669280" y="3986784"/>
+            <a:ext cx="274320" cy="0"/>
+          </a:xfrm>
+          <a:prstGeom prst="line">
+            <a:avLst/>
+          </a:prstGeom>
+          <a:noFill/>
+          <a:ln w="22860" cap="round">
+            <a:solidFill>
+              <a:srgbClr val="65B000"/>
+            </a:solidFill>
+            <a:tailEnd type="triangle" w="med" len="med"/>
+          </a:ln>
+        </p:spPr>
+      </p:sp>
       <p:sp>
         <p:nvSpPr>
           <p:cNvPr id="8" name="TextBox 7"/>
@@ -17897,7 +18211,7 @@
 </file>
 
 <file path=ppt/slides/slide44.xml><?xml version="1.0" encoding="utf-8"?>
-<p:sld xmlns:a="http://schemas.openxmlformats.org/drawingml/2006/main" xmlns:p="http://schemas.openxmlformats.org/presentationml/2006/main" xmlns:r="http://schemas.openxmlformats.org/officeDocument/2006/relationships">
+<p:sld xmlns:a="http://schemas.openxmlformats.org/drawingml/2006/main" xmlns:p="http://schemas.openxmlformats.org/presentationml/2006/main">
   <p:cSld>
     <p:bg>
       <p:bgPr>
@@ -18109,30 +18423,342 @@
           </a:p>
         </p:txBody>
       </p:sp>
-      <p:pic>
-        <p:nvPicPr>
-          <p:cNvPr id="7" name="Picture 6" descr="decision.png"/>
-          <p:cNvPicPr>
-            <a:picLocks noChangeAspect="1"/>
-          </p:cNvPicPr>
-          <p:nvPr/>
-        </p:nvPicPr>
-        <p:blipFill>
-          <a:blip r:embed="rId2"/>
-          <a:stretch>
-            <a:fillRect/>
-          </a:stretch>
-        </p:blipFill>
-        <p:spPr>
-          <a:xfrm>
-            <a:off x="594360" y="2101595"/>
-            <a:ext cx="6766560" cy="3157728"/>
-          </a:xfrm>
-          <a:prstGeom prst="rect">
-            <a:avLst/>
-          </a:prstGeom>
-        </p:spPr>
-      </p:pic>
+      <p:sp>
+        <p:nvSpPr>
+          <p:cNvPr id="10" name="Editable More Control Square"/>
+          <p:cNvSpPr/>
+          <p:nvPr/>
+        </p:nvSpPr>
+        <p:spPr>
+          <a:xfrm>
+            <a:off x="877824" y="2249424"/>
+            <a:ext cx="2487168" cy="2432304"/>
+          </a:xfrm>
+          <a:prstGeom prst="rect">
+            <a:avLst/>
+          </a:prstGeom>
+          <a:solidFill>
+            <a:srgbClr val="FDEAEA"/>
+          </a:solidFill>
+          <a:ln w="12700">
+            <a:solidFill>
+              <a:srgbClr val="D83A34"/>
+            </a:solidFill>
+          </a:ln>
+        </p:spPr>
+      </p:sp>
+      <p:sp>
+        <p:nvSpPr>
+          <p:cNvPr id="11" name="Editable More Productivity Square"/>
+          <p:cNvSpPr/>
+          <p:nvPr/>
+        </p:nvSpPr>
+        <p:spPr>
+          <a:xfrm>
+            <a:off x="3941064" y="2249424"/>
+            <a:ext cx="2487168" cy="2432304"/>
+          </a:xfrm>
+          <a:prstGeom prst="rect">
+            <a:avLst/>
+          </a:prstGeom>
+          <a:solidFill>
+            <a:srgbClr val="EDF9E9"/>
+          </a:solidFill>
+          <a:ln w="12700">
+            <a:solidFill>
+              <a:srgbClr val="62B000"/>
+            </a:solidFill>
+          </a:ln>
+        </p:spPr>
+      </p:sp>
+      <p:sp>
+        <p:nvSpPr>
+          <p:cNvPr id="12" name="Editable Control Productivity Arrow"/>
+          <p:cNvSpPr/>
+          <p:nvPr/>
+        </p:nvSpPr>
+        <p:spPr>
+          <a:xfrm>
+            <a:off x="3547872" y="3401568"/>
+            <a:ext cx="320040" cy="164592"/>
+          </a:xfrm>
+          <a:prstGeom prst="rightArrow">
+            <a:avLst/>
+          </a:prstGeom>
+          <a:solidFill>
+            <a:srgbClr val="63AF00"/>
+          </a:solidFill>
+          <a:ln w="6350">
+            <a:solidFill>
+              <a:srgbClr val="63AF00"/>
+            </a:solidFill>
+          </a:ln>
+        </p:spPr>
+      </p:sp>
+      <p:sp>
+        <p:nvSpPr>
+          <p:cNvPr id="13" name="More Control Label"/>
+          <p:cNvSpPr txBox="1"/>
+          <p:nvPr/>
+        </p:nvSpPr>
+        <p:spPr>
+          <a:xfrm>
+            <a:off x="1188720" y="2542032"/>
+            <a:ext cx="1865376" cy="320040"/>
+          </a:xfrm>
+          <a:prstGeom prst="rect">
+            <a:avLst/>
+          </a:prstGeom>
+          <a:noFill/>
+          <a:ln/>
+        </p:spPr>
+        <p:txBody>
+          <a:bodyPr wrap="square" anchor="t" lIns="0" tIns="0" rIns="0" bIns="0">
+            <a:normAutofit/>
+          </a:bodyPr>
+          <a:lstStyle/>
+          <a:p>
+            <a:pPr algn="l"/>
+            <a:r>
+              <a:rPr sz="1400" b="1">
+                <a:solidFill>
+                  <a:srgbClr val="1A1A1A"/>
+                </a:solidFill>
+                <a:latin typeface="Aptos"/>
+              </a:rPr>
+              <a:t>More control</a:t>
+            </a:r>
+          </a:p>
+        </p:txBody>
+      </p:sp>
+      <p:sp>
+        <p:nvSpPr>
+          <p:cNvPr id="14" name="More Productivity Label"/>
+          <p:cNvSpPr txBox="1"/>
+          <p:nvPr/>
+        </p:nvSpPr>
+        <p:spPr>
+          <a:xfrm>
+            <a:off x="4251960" y="2542032"/>
+            <a:ext cx="1865376" cy="320040"/>
+          </a:xfrm>
+          <a:prstGeom prst="rect">
+            <a:avLst/>
+          </a:prstGeom>
+          <a:noFill/>
+          <a:ln/>
+        </p:spPr>
+        <p:txBody>
+          <a:bodyPr wrap="square" anchor="t" lIns="0" tIns="0" rIns="0" bIns="0">
+            <a:normAutofit/>
+          </a:bodyPr>
+          <a:lstStyle/>
+          <a:p>
+            <a:pPr algn="l"/>
+            <a:r>
+              <a:rPr sz="1400" b="1">
+                <a:solidFill>
+                  <a:srgbClr val="1A1A1A"/>
+                </a:solidFill>
+                <a:latin typeface="Aptos"/>
+              </a:rPr>
+              <a:t>More productivity</a:t>
+            </a:r>
+          </a:p>
+        </p:txBody>
+      </p:sp>
+      <p:sp>
+        <p:nvSpPr>
+          <p:cNvPr id="15" name="More Control Bullets"/>
+          <p:cNvSpPr txBox="1"/>
+          <p:nvPr/>
+        </p:nvSpPr>
+        <p:spPr>
+          <a:xfrm>
+            <a:off x="1261872" y="3054096"/>
+            <a:ext cx="1847088" cy="1508760"/>
+          </a:xfrm>
+          <a:prstGeom prst="rect">
+            <a:avLst/>
+          </a:prstGeom>
+          <a:noFill/>
+          <a:ln/>
+        </p:spPr>
+        <p:txBody>
+          <a:bodyPr wrap="square" anchor="t" lIns="0" tIns="0" rIns="0" bIns="0">
+            <a:normAutofit/>
+          </a:bodyPr>
+          <a:lstStyle/>
+          <a:p>
+            <a:pPr algn="l" marL="171450" indent="-114300">
+              <a:spcAft>
+                <a:spcPts val="600"/>
+              </a:spcAft>
+              <a:buFont typeface="Aptos"/>
+              <a:buChar char="•"/>
+            </a:pPr>
+            <a:r>
+              <a:rPr sz="980">
+                <a:solidFill>
+                  <a:srgbClr val="303030"/>
+                </a:solidFill>
+                <a:latin typeface="Aptos"/>
+              </a:rPr>
+              <a:t>custom CUDA</a:t>
+            </a:r>
+          </a:p>
+          <a:p>
+            <a:pPr algn="l" marL="171450" indent="-114300">
+              <a:spcAft>
+                <a:spcPts val="600"/>
+              </a:spcAft>
+              <a:buFont typeface="Aptos"/>
+              <a:buChar char="•"/>
+            </a:pPr>
+            <a:r>
+              <a:rPr sz="980">
+                <a:solidFill>
+                  <a:srgbClr val="303030"/>
+                </a:solidFill>
+                <a:latin typeface="Aptos"/>
+              </a:rPr>
+              <a:t>explicit memory</a:t>
+            </a:r>
+          </a:p>
+          <a:p>
+            <a:pPr algn="l" marL="171450" indent="-114300">
+              <a:spcAft>
+                <a:spcPts val="600"/>
+              </a:spcAft>
+              <a:buFont typeface="Aptos"/>
+              <a:buChar char="•"/>
+            </a:pPr>
+            <a:r>
+              <a:rPr sz="980">
+                <a:solidFill>
+                  <a:srgbClr val="303030"/>
+                </a:solidFill>
+                <a:latin typeface="Aptos"/>
+              </a:rPr>
+              <a:t>kernel launch</a:t>
+            </a:r>
+          </a:p>
+          <a:p>
+            <a:pPr algn="l" marL="171450" indent="-114300">
+              <a:spcAft>
+                <a:spcPts val="600"/>
+              </a:spcAft>
+              <a:buFont typeface="Aptos"/>
+              <a:buChar char="•"/>
+            </a:pPr>
+            <a:r>
+              <a:rPr sz="980">
+                <a:solidFill>
+                  <a:srgbClr val="303030"/>
+                </a:solidFill>
+                <a:latin typeface="Aptos"/>
+              </a:rPr>
+              <a:t>debug lower level</a:t>
+            </a:r>
+          </a:p>
+        </p:txBody>
+      </p:sp>
+      <p:sp>
+        <p:nvSpPr>
+          <p:cNvPr id="16" name="More Productivity Bullets"/>
+          <p:cNvSpPr txBox="1"/>
+          <p:nvPr/>
+        </p:nvSpPr>
+        <p:spPr>
+          <a:xfrm>
+            <a:off x="4325112" y="3054096"/>
+            <a:ext cx="1847088" cy="1508760"/>
+          </a:xfrm>
+          <a:prstGeom prst="rect">
+            <a:avLst/>
+          </a:prstGeom>
+          <a:noFill/>
+          <a:ln/>
+        </p:spPr>
+        <p:txBody>
+          <a:bodyPr wrap="square" anchor="t" lIns="0" tIns="0" rIns="0" bIns="0">
+            <a:normAutofit/>
+          </a:bodyPr>
+          <a:lstStyle/>
+          <a:p>
+            <a:pPr algn="l" marL="171450" indent="-114300">
+              <a:spcAft>
+                <a:spcPts val="600"/>
+              </a:spcAft>
+              <a:buFont typeface="Aptos"/>
+              <a:buChar char="•"/>
+            </a:pPr>
+            <a:r>
+              <a:rPr sz="980">
+                <a:solidFill>
+                  <a:srgbClr val="303030"/>
+                </a:solidFill>
+                <a:latin typeface="Aptos"/>
+              </a:rPr>
+              <a:t>Thrust/CUB</a:t>
+            </a:r>
+          </a:p>
+          <a:p>
+            <a:pPr algn="l" marL="171450" indent="-114300">
+              <a:spcAft>
+                <a:spcPts val="600"/>
+              </a:spcAft>
+              <a:buFont typeface="Aptos"/>
+              <a:buChar char="•"/>
+            </a:pPr>
+            <a:r>
+              <a:rPr sz="980">
+                <a:solidFill>
+                  <a:srgbClr val="303030"/>
+                </a:solidFill>
+                <a:latin typeface="Aptos"/>
+              </a:rPr>
+              <a:t>cuBLAS/cuDNN</a:t>
+            </a:r>
+          </a:p>
+          <a:p>
+            <a:pPr algn="l" marL="171450" indent="-114300">
+              <a:spcAft>
+                <a:spcPts val="600"/>
+              </a:spcAft>
+              <a:buFont typeface="Aptos"/>
+              <a:buChar char="•"/>
+            </a:pPr>
+            <a:r>
+              <a:rPr sz="980">
+                <a:solidFill>
+                  <a:srgbClr val="303030"/>
+                </a:solidFill>
+                <a:latin typeface="Aptos"/>
+              </a:rPr>
+              <a:t>JAX/XLA</a:t>
+            </a:r>
+          </a:p>
+          <a:p>
+            <a:pPr algn="l" marL="171450" indent="-114300">
+              <a:spcAft>
+                <a:spcPts val="600"/>
+              </a:spcAft>
+              <a:buFont typeface="Aptos"/>
+              <a:buChar char="•"/>
+            </a:pPr>
+            <a:r>
+              <a:rPr sz="980">
+                <a:solidFill>
+                  <a:srgbClr val="303030"/>
+                </a:solidFill>
+                <a:latin typeface="Aptos"/>
+              </a:rPr>
+              <a:t>PyTorch / TF / MLIR</a:t>
+            </a:r>
+          </a:p>
+        </p:txBody>
+      </p:sp>
       <p:sp>
         <p:nvSpPr>
           <p:cNvPr id="8" name="TextBox 7"/>
@@ -19196,7 +19822,7 @@
 </file>
 
 <file path=ppt/slides/slide47.xml><?xml version="1.0" encoding="utf-8"?>
-<p:sld xmlns:a="http://schemas.openxmlformats.org/drawingml/2006/main" xmlns:p="http://schemas.openxmlformats.org/presentationml/2006/main" xmlns:r="http://schemas.openxmlformats.org/officeDocument/2006/relationships">
+<p:sld xmlns:a="http://schemas.openxmlformats.org/drawingml/2006/main" xmlns:p="http://schemas.openxmlformats.org/presentationml/2006/main">
   <p:cSld>
     <p:bg>
       <p:bgPr>
@@ -19651,30 +20277,344 @@
           </a:p>
         </p:txBody>
       </p:sp>
-      <p:pic>
-        <p:nvPicPr>
-          <p:cNvPr id="12" name="Picture 11" descr="target_graph.png"/>
-          <p:cNvPicPr>
-            <a:picLocks noChangeAspect="1"/>
-          </p:cNvPicPr>
-          <p:nvPr/>
-        </p:nvPicPr>
-        <p:blipFill>
-          <a:blip r:embed="rId2"/>
-          <a:stretch>
-            <a:fillRect/>
-          </a:stretch>
-        </p:blipFill>
-        <p:spPr>
-          <a:xfrm>
-            <a:off x="7452360" y="3648456"/>
-            <a:ext cx="4251960" cy="1984248"/>
-          </a:xfrm>
-          <a:prstGeom prst="rect">
-            <a:avLst/>
-          </a:prstGeom>
-        </p:spPr>
-      </p:pic>
+      <p:sp>
+        <p:nvSpPr>
+          <p:cNvPr id="20" name="Compact Target Graph Title"/>
+          <p:cNvSpPr txBox="1"/>
+          <p:nvPr/>
+        </p:nvSpPr>
+        <p:spPr>
+          <a:xfrm>
+            <a:off x="7607808" y="3767328"/>
+            <a:ext cx="3840480" cy="256032"/>
+          </a:xfrm>
+          <a:prstGeom prst="rect">
+            <a:avLst/>
+          </a:prstGeom>
+          <a:noFill/>
+          <a:ln/>
+        </p:spPr>
+        <p:txBody>
+          <a:bodyPr wrap="square" anchor="t" lIns="0" tIns="0" rIns="0" bIns="0">
+            <a:normAutofit/>
+          </a:bodyPr>
+          <a:lstStyle/>
+          <a:p>
+            <a:pPr algn="l"/>
+            <a:r>
+              <a:rPr sz="760" b="1">
+                <a:solidFill>
+                  <a:srgbClr val="121B2A"/>
+                </a:solidFill>
+                <a:latin typeface="Aptos"/>
+              </a:rPr>
+              <a:t>Bazel target graph</a:t>
+            </a:r>
+          </a:p>
+        </p:txBody>
+      </p:sp>
+      <p:sp>
+        <p:nvSpPr>
+          <p:cNvPr id="21" name="Compact Benchmark Node"/>
+          <p:cNvSpPr/>
+          <p:nvPr/>
+        </p:nvSpPr>
+        <p:spPr>
+          <a:xfrm>
+            <a:off x="7818120" y="4370832"/>
+            <a:ext cx="640080" cy="274320"/>
+          </a:xfrm>
+          <a:prstGeom prst="roundRect">
+            <a:avLst/>
+          </a:prstGeom>
+          <a:solidFill>
+            <a:srgbClr val="E6F6F8"/>
+          </a:solidFill>
+          <a:ln w="10160">
+            <a:solidFill>
+              <a:srgbClr val="9BA9B8"/>
+            </a:solidFill>
+          </a:ln>
+        </p:spPr>
+        <p:txBody>
+          <a:bodyPr wrap="square" anchor="ctr" lIns="73152" tIns="27432" rIns="73152" bIns="27432">
+            <a:normAutofit/>
+          </a:bodyPr>
+          <a:lstStyle/>
+          <a:p>
+            <a:pPr algn="ctr"/>
+            <a:r>
+              <a:rPr sz="460">
+                <a:solidFill>
+                  <a:srgbClr val="1C2430"/>
+                </a:solidFill>
+                <a:latin typeface="Aptos"/>
+              </a:rPr>
+              <a:t>benchmark</a:t>
+            </a:r>
+          </a:p>
+        </p:txBody>
+      </p:sp>
+      <p:sp>
+        <p:nvSpPr>
+          <p:cNvPr id="22" name="Compact Vector CPU Node"/>
+          <p:cNvSpPr/>
+          <p:nvPr/>
+        </p:nvSpPr>
+        <p:spPr>
+          <a:xfrm>
+            <a:off x="8668512" y="4142232"/>
+            <a:ext cx="731520" cy="274320"/>
+          </a:xfrm>
+          <a:prstGeom prst="roundRect">
+            <a:avLst/>
+          </a:prstGeom>
+          <a:solidFill>
+            <a:srgbClr val="E4EFFC"/>
+          </a:solidFill>
+          <a:ln w="10160">
+            <a:solidFill>
+              <a:srgbClr val="9BA9B8"/>
+            </a:solidFill>
+          </a:ln>
+        </p:spPr>
+        <p:txBody>
+          <a:bodyPr wrap="square" anchor="ctr" lIns="73152" tIns="27432" rIns="73152" bIns="27432">
+            <a:normAutofit/>
+          </a:bodyPr>
+          <a:lstStyle/>
+          <a:p>
+            <a:pPr algn="ctr"/>
+            <a:r>
+              <a:rPr sz="460">
+                <a:solidFill>
+                  <a:srgbClr val="1C2430"/>
+                </a:solidFill>
+                <a:latin typeface="Aptos"/>
+              </a:rPr>
+              <a:t>vector_cpu</a:t>
+            </a:r>
+          </a:p>
+        </p:txBody>
+      </p:sp>
+      <p:sp>
+        <p:nvSpPr>
+          <p:cNvPr id="23" name="Compact Vector Add Node"/>
+          <p:cNvSpPr/>
+          <p:nvPr/>
+        </p:nvSpPr>
+        <p:spPr>
+          <a:xfrm>
+            <a:off x="8668512" y="4617720"/>
+            <a:ext cx="731520" cy="274320"/>
+          </a:xfrm>
+          <a:prstGeom prst="roundRect">
+            <a:avLst/>
+          </a:prstGeom>
+          <a:solidFill>
+            <a:srgbClr val="EAF8E7"/>
+          </a:solidFill>
+          <a:ln w="10160">
+            <a:solidFill>
+              <a:srgbClr val="9BA9B8"/>
+            </a:solidFill>
+          </a:ln>
+        </p:spPr>
+        <p:txBody>
+          <a:bodyPr wrap="square" anchor="ctr" lIns="73152" tIns="27432" rIns="73152" bIns="27432">
+            <a:normAutofit/>
+          </a:bodyPr>
+          <a:lstStyle/>
+          <a:p>
+            <a:pPr algn="ctr"/>
+            <a:r>
+              <a:rPr sz="460">
+                <a:solidFill>
+                  <a:srgbClr val="1C2430"/>
+                </a:solidFill>
+                <a:latin typeface="Aptos"/>
+              </a:rPr>
+              <a:t>vector_add</a:t>
+            </a:r>
+          </a:p>
+        </p:txBody>
+      </p:sp>
+      <p:sp>
+        <p:nvSpPr>
+          <p:cNvPr id="24" name="Compact Device Lib Node"/>
+          <p:cNvSpPr/>
+          <p:nvPr/>
+        </p:nvSpPr>
+        <p:spPr>
+          <a:xfrm>
+            <a:off x="9619488" y="4617720"/>
+            <a:ext cx="749808" cy="274320"/>
+          </a:xfrm>
+          <a:prstGeom prst="roundRect">
+            <a:avLst/>
+          </a:prstGeom>
+          <a:solidFill>
+            <a:srgbClr val="FFF4DE"/>
+          </a:solidFill>
+          <a:ln w="10160">
+            <a:solidFill>
+              <a:srgbClr val="9BA9B8"/>
+            </a:solidFill>
+          </a:ln>
+        </p:spPr>
+        <p:txBody>
+          <a:bodyPr wrap="square" anchor="ctr" lIns="73152" tIns="27432" rIns="73152" bIns="27432">
+            <a:normAutofit/>
+          </a:bodyPr>
+          <a:lstStyle/>
+          <a:p>
+            <a:pPr algn="ctr"/>
+            <a:r>
+              <a:rPr sz="460">
+                <a:solidFill>
+                  <a:srgbClr val="1C2430"/>
+                </a:solidFill>
+                <a:latin typeface="Aptos"/>
+              </a:rPr>
+              <a:t>device_lib</a:t>
+            </a:r>
+          </a:p>
+        </p:txBody>
+      </p:sp>
+      <p:sp>
+        <p:nvSpPr>
+          <p:cNvPr id="25" name="Compact Runtime Node"/>
+          <p:cNvSpPr/>
+          <p:nvPr/>
+        </p:nvSpPr>
+        <p:spPr>
+          <a:xfrm>
+            <a:off x="10625328" y="4617720"/>
+            <a:ext cx="694944" cy="274320"/>
+          </a:xfrm>
+          <a:prstGeom prst="roundRect">
+            <a:avLst/>
+          </a:prstGeom>
+          <a:solidFill>
+            <a:srgbClr val="EAE5FF"/>
+          </a:solidFill>
+          <a:ln w="10160">
+            <a:solidFill>
+              <a:srgbClr val="9BA9B8"/>
+            </a:solidFill>
+          </a:ln>
+        </p:spPr>
+        <p:txBody>
+          <a:bodyPr wrap="square" anchor="ctr" lIns="73152" tIns="27432" rIns="73152" bIns="27432">
+            <a:normAutofit/>
+          </a:bodyPr>
+          <a:lstStyle/>
+          <a:p>
+            <a:pPr algn="ctr"/>
+            <a:r>
+              <a:rPr sz="460">
+                <a:solidFill>
+                  <a:srgbClr val="1C2430"/>
+                </a:solidFill>
+                <a:latin typeface="Aptos"/>
+              </a:rPr>
+              <a:t>runtime</a:t>
+            </a:r>
+          </a:p>
+        </p:txBody>
+      </p:sp>
+      <p:sp>
+        <p:nvSpPr>
+          <p:cNvPr id="26" name="Compact Benchmark To Vector CPU Connector"/>
+          <p:cNvSpPr/>
+          <p:nvPr/>
+        </p:nvSpPr>
+        <p:spPr>
+          <a:xfrm flipV="1">
+            <a:off x="8458200" y="4279392"/>
+            <a:ext cx="210312" cy="228600"/>
+          </a:xfrm>
+          <a:prstGeom prst="line">
+            <a:avLst/>
+          </a:prstGeom>
+          <a:noFill/>
+          <a:ln w="13970" cap="round">
+            <a:solidFill>
+              <a:srgbClr val="65B000"/>
+            </a:solidFill>
+            <a:tailEnd type="triangle" w="med" len="med"/>
+          </a:ln>
+        </p:spPr>
+      </p:sp>
+      <p:sp>
+        <p:nvSpPr>
+          <p:cNvPr id="27" name="Compact Benchmark To Vector Add Connector"/>
+          <p:cNvSpPr/>
+          <p:nvPr/>
+        </p:nvSpPr>
+        <p:spPr>
+          <a:xfrm>
+            <a:off x="8458200" y="4507992"/>
+            <a:ext cx="210312" cy="246888"/>
+          </a:xfrm>
+          <a:prstGeom prst="line">
+            <a:avLst/>
+          </a:prstGeom>
+          <a:noFill/>
+          <a:ln w="13970" cap="round">
+            <a:solidFill>
+              <a:srgbClr val="65B000"/>
+            </a:solidFill>
+            <a:tailEnd type="triangle" w="med" len="med"/>
+          </a:ln>
+        </p:spPr>
+      </p:sp>
+      <p:sp>
+        <p:nvSpPr>
+          <p:cNvPr id="28" name="Compact Vector Add To Device Lib Connector"/>
+          <p:cNvSpPr/>
+          <p:nvPr/>
+        </p:nvSpPr>
+        <p:spPr>
+          <a:xfrm>
+            <a:off x="9400032" y="4754880"/>
+            <a:ext cx="219456" cy="0"/>
+          </a:xfrm>
+          <a:prstGeom prst="line">
+            <a:avLst/>
+          </a:prstGeom>
+          <a:noFill/>
+          <a:ln w="13970" cap="round">
+            <a:solidFill>
+              <a:srgbClr val="65B000"/>
+            </a:solidFill>
+            <a:tailEnd type="triangle" w="med" len="med"/>
+          </a:ln>
+        </p:spPr>
+      </p:sp>
+      <p:sp>
+        <p:nvSpPr>
+          <p:cNvPr id="29" name="Compact Device Lib To Runtime Connector"/>
+          <p:cNvSpPr/>
+          <p:nvPr/>
+        </p:nvSpPr>
+        <p:spPr>
+          <a:xfrm>
+            <a:off x="10369296" y="4754880"/>
+            <a:ext cx="256032" cy="0"/>
+          </a:xfrm>
+          <a:prstGeom prst="line">
+            <a:avLst/>
+          </a:prstGeom>
+          <a:noFill/>
+          <a:ln w="13970" cap="round">
+            <a:solidFill>
+              <a:srgbClr val="65B000"/>
+            </a:solidFill>
+            <a:tailEnd type="triangle" w="med" len="med"/>
+          </a:ln>
+        </p:spPr>
+      </p:sp>
       <p:sp>
         <p:nvSpPr>
           <p:cNvPr id="13" name="TextBox 12"/>
